--- a/Pharmacy_Management_System (1).pptx
+++ b/Pharmacy_Management_System (1).pptx
@@ -6106,7 +6106,29 @@
                 <a:ea typeface="Calibri" pitchFamily="34" charset="-122"/>
                 <a:cs typeface="Calibri" pitchFamily="34" charset="-120"/>
               </a:rPr>
-              <a:t>Built with C++ using OOAD and OOP concepts like inheritance, polymorphism, encapsulation, and abstraction</a:t>
+              <a:t>Built with C++ </a:t>
+            </a:r>
+            <a:r>
+              <a:rPr lang="en-US" sz="1350">
+                <a:solidFill>
+                  <a:srgbClr val="1A2E35"/>
+                </a:solidFill>
+                <a:latin typeface="Calibri" pitchFamily="34" charset="0"/>
+                <a:ea typeface="Calibri" pitchFamily="34" charset="-122"/>
+                <a:cs typeface="Calibri" pitchFamily="34" charset="-120"/>
+              </a:rPr>
+              <a:t>using OOP </a:t>
+            </a:r>
+            <a:r>
+              <a:rPr lang="en-US" sz="1350" dirty="0">
+                <a:solidFill>
+                  <a:srgbClr val="1A2E35"/>
+                </a:solidFill>
+                <a:latin typeface="Calibri" pitchFamily="34" charset="0"/>
+                <a:ea typeface="Calibri" pitchFamily="34" charset="-122"/>
+                <a:cs typeface="Calibri" pitchFamily="34" charset="-120"/>
+              </a:rPr>
+              <a:t>concepts like inheritance, polymorphism, encapsulation, and abstraction</a:t>
             </a:r>
           </a:p>
           <a:p>
@@ -6270,7 +6292,7 @@
                 <a:ea typeface="Calibri" pitchFamily="34" charset="-122"/>
                 <a:cs typeface="Calibri" pitchFamily="34" charset="-120"/>
               </a:rPr>
-              <a:t>Password verification and update functionality </a:t>
+              <a:t>Password verification functionality </a:t>
             </a:r>
           </a:p>
           <a:p>
